--- a/public/fun/pack/pptx/weddingpro/결혼식프리미엄_13_식순중심_오팔펄.pptx
+++ b/public/fun/pack/pptx/weddingpro/결혼식프리미엄_13_식순중심_오팔펄.pptx
@@ -113,12 +113,12 @@
   <p:extLst>
     <p:ext uri="{521415D9-36F7-43E2-AB2F-B90AF26B5E84}">
       <p14:sectionLst xmlns:p14="http://schemas.microsoft.com/office/powerpoint/2010/main">
-        <p14:section name="시작" id="{4A149A10-FD41-4FFC-A73D-2002A37365F9}">
+        <p14:section name="시작" id="{3AC4A9AA-E066-40B3-81E0-ABB7C87E6D5E}">
           <p14:sldIdLst>
             <p14:sldId id="256"/>
           </p14:sldIdLst>
         </p14:section>
-        <p14:section name="본문" id="{ACF566A0-3577-44A2-8E14-E3C002B36279}">
+        <p14:section name="본문" id="{939909B3-F1D4-43BE-96C4-37AD52633530}">
           <p14:sldIdLst>
             <p14:sldId id="257"/>
             <p14:sldId id="258"/>
@@ -127,7 +127,7 @@
             <p14:sldId id="261"/>
           </p14:sldIdLst>
         </p14:section>
-        <p14:section name="마무리" id="{0DA78F1A-8ED1-4789-9BDD-8C77BEFA16EB}">
+        <p14:section name="마무리" id="{9858ED54-38CC-4413-9671-618E3DEBFBCA}">
           <p14:sldIdLst>
             <p14:sldId id="262"/>
           </p14:sldIdLst>
@@ -1613,7 +1613,7 @@
             </a:lvl1pPr>
           </a:lstStyle>
           <a:p>
-            <a:fld id="{DCEF753B-61DD-42CF-9641-FF1DC0A00242}" type="slidenum">
+            <a:fld id="{07AB62DE-08E1-47B5-B529-4B82938B3517}" type="slidenum">
               <a:rPr lang="en-US"/>
               <a:t>‹#›</a:t>
             </a:fld>
@@ -2364,7 +2364,7 @@
             </a:lvl1pPr>
           </a:lstStyle>
           <a:p>
-            <a:fld id="{D1EF9FDF-8C14-44FE-BA78-D1809CD3246D}" type="slidenum">
+            <a:fld id="{CF9ED812-4F90-4374-8545-CCE791BDA0DD}" type="slidenum">
               <a:rPr lang="en-US"/>
               <a:t>‹#›</a:t>
             </a:fld>
@@ -3042,7 +3042,7 @@
             </a:lvl1pPr>
           </a:lstStyle>
           <a:p>
-            <a:fld id="{2A16E457-BE3B-4EEB-85E2-BD7A48E5FFDD}" type="slidenum">
+            <a:fld id="{AFFFED64-96BE-4033-856C-712B65F196F1}" type="slidenum">
               <a:rPr lang="en-US"/>
               <a:t>‹#›</a:t>
             </a:fld>
@@ -3911,7 +3911,7 @@
           <a:p>
             <a:r>
               <a:rPr lang="ko-KR"/>
-              <a:t>0000. 00. 00 · 예식장 이름</a:t>
+              <a:t>날짜 입력 · 예식장 이름</a:t>
             </a:r>
           </a:p>
         </p:txBody>
@@ -4134,7 +4134,7 @@
           <a:bodyPr/>
           <a:lstStyle/>
           <a:p>
-            <a:fld id="{EF3C0959-071C-4B2F-8562-91F1FA3BE06F}" type="slidenum">
+            <a:fld id="{3EE8F215-7DEF-43DE-9487-BEE60DEC53A1}" type="slidenum">
               <a:rPr lang="en-US"/>
               <a:t>‹#›</a:t>
             </a:fld>
@@ -4536,7 +4536,7 @@
           <a:bodyPr/>
           <a:lstStyle/>
           <a:p>
-            <a:fld id="{0A32BCAC-6DE0-49EE-8595-A70890A3C380}" type="slidenum">
+            <a:fld id="{2331B2B0-18EA-4E44-A44A-FBDD1FD41DBB}" type="slidenum">
               <a:rPr lang="en-US"/>
               <a:t>‹#›</a:t>
             </a:fld>
@@ -5365,7 +5365,7 @@
           <a:bodyPr/>
           <a:lstStyle/>
           <a:p>
-            <a:fld id="{B5902B21-C761-412B-B9E8-94417FEAF230}" type="slidenum">
+            <a:fld id="{B2AC0050-3066-4C01-B08E-A239307F2398}" type="slidenum">
               <a:rPr lang="en-US"/>
               <a:t>‹#›</a:t>
             </a:fld>
@@ -6638,7 +6638,7 @@
           <a:bodyPr/>
           <a:lstStyle/>
           <a:p>
-            <a:fld id="{32234F2A-8B9E-4B19-B7A1-066CE4570A4D}" type="slidenum">
+            <a:fld id="{89707186-CD41-42CC-9E26-B7D4EF664C07}" type="slidenum">
               <a:rPr lang="en-US"/>
               <a:t>‹#›</a:t>
             </a:fld>
@@ -6726,7 +6726,7 @@
           <a:bodyPr/>
           <a:lstStyle/>
           <a:p>
-            <a:fld id="{BB427BFE-B350-49E6-AE19-6BF7BBA8D205}" type="slidenum">
+            <a:fld id="{F2F8742A-992A-4820-BAEE-62CB47CC6BD5}" type="slidenum">
               <a:rPr lang="en-US"/>
               <a:t>‹#›</a:t>
             </a:fld>
